--- a/morning-registration-activities/form-time-quiz-christmas/downloads/Form_Time_Quiz_Christmas_Sixth_Form.pptx
+++ b/morning-registration-activities/form-time-quiz-christmas/downloads/Form_Time_Quiz_Christmas_Sixth_Form.pptx
@@ -3193,7 +3193,7 @@
                 <a:solidFill>
                   <a:srgbClr val="2F5A44"/>
                 </a:solidFill>
-                <a:latin typeface="Karla"/>
+                <a:latin typeface="Calibri"/>
               </a:rPr>
               <a:t>MORNING REGISTRATION ACTIVITIES</a:t>
             </a:r>
@@ -3231,11 +3231,11 @@
               </a:spcAft>
             </a:pPr>
             <a:r>
-              <a:rPr sz="3000" b="1" i="0">
+              <a:rPr sz="3000" b="0" i="0">
                 <a:solidFill>
                   <a:srgbClr val="2F5A44"/>
                 </a:solidFill>
-                <a:latin typeface="Libre Caslon Display"/>
+                <a:latin typeface="Georgia"/>
               </a:rPr>
               <a:t>The Form Time Quiz</a:t>
             </a:r>
@@ -3290,7 +3290,7 @@
                 <a:solidFill>
                   <a:srgbClr val="FFFDF7"/>
                 </a:solidFill>
-                <a:latin typeface="Karla"/>
+                <a:latin typeface="Calibri"/>
               </a:rPr>
               <a:t>CHRISTMAS EDITION  ·  SIXTH FORM</a:t>
             </a:r>
@@ -3332,7 +3332,7 @@
                 <a:solidFill>
                   <a:srgbClr val="5C6552"/>
                 </a:solidFill>
-                <a:latin typeface="Karla"/>
+                <a:latin typeface="Calibri"/>
               </a:rPr>
               <a:t>Ten questions: four fact or myth, then three with options and three to write.</a:t>
             </a:r>
@@ -3482,11 +3482,11 @@
               </a:spcAft>
             </a:pPr>
             <a:r>
-              <a:rPr sz="1350" b="1" i="0">
+              <a:rPr sz="1350" b="0" i="0">
                 <a:solidFill>
                   <a:srgbClr val="2F5A44"/>
                 </a:solidFill>
-                <a:latin typeface="Libre Caslon Display"/>
+                <a:latin typeface="Georgia"/>
               </a:rPr>
               <a:t>Get into teams</a:t>
             </a:r>
@@ -3528,7 +3528,7 @@
                 <a:solidFill>
                   <a:srgbClr val="5C6552"/>
                 </a:solidFill>
-                <a:latin typeface="Karla"/>
+                <a:latin typeface="Calibri"/>
               </a:rPr>
               <a:t>Three or four to a team, with one answer sheet between you.</a:t>
             </a:r>
@@ -3678,11 +3678,11 @@
               </a:spcAft>
             </a:pPr>
             <a:r>
-              <a:rPr sz="1350" b="1" i="0">
+              <a:rPr sz="1350" b="0" i="0">
                 <a:solidFill>
                   <a:srgbClr val="2F5A44"/>
                 </a:solidFill>
-                <a:latin typeface="Libre Caslon Display"/>
+                <a:latin typeface="Georgia"/>
               </a:rPr>
               <a:t>Answer together</a:t>
             </a:r>
@@ -3724,7 +3724,7 @@
                 <a:solidFill>
                   <a:srgbClr val="5C6552"/>
                 </a:solidFill>
-                <a:latin typeface="Karla"/>
+                <a:latin typeface="Calibri"/>
               </a:rPr>
               <a:t>Each question goes up on the board. Agree an answer, then write it down.</a:t>
             </a:r>
@@ -3874,11 +3874,11 @@
               </a:spcAft>
             </a:pPr>
             <a:r>
-              <a:rPr sz="1350" b="1" i="0">
+              <a:rPr sz="1350" b="0" i="0">
                 <a:solidFill>
                   <a:srgbClr val="2F5A44"/>
                 </a:solidFill>
-                <a:latin typeface="Libre Caslon Display"/>
+                <a:latin typeface="Georgia"/>
               </a:rPr>
               <a:t>Swap and mark</a:t>
             </a:r>
@@ -3920,7 +3920,7 @@
                 <a:solidFill>
                   <a:srgbClr val="5C6552"/>
                 </a:solidFill>
-                <a:latin typeface="Karla"/>
+                <a:latin typeface="Calibri"/>
               </a:rPr>
               <a:t>Swap sheets with the team next to you, then the answers go up one at a time.</a:t>
             </a:r>
@@ -3962,7 +3962,7 @@
                 <a:solidFill>
                   <a:srgbClr val="8B9179"/>
                 </a:solidFill>
-                <a:latin typeface="Karla"/>
+                <a:latin typeface="Calibri"/>
               </a:rPr>
               <a:t>Needs: one answer sheet per team, from the resource pack.</a:t>
             </a:r>
@@ -4028,7 +4028,7 @@
                 <a:solidFill>
                   <a:srgbClr val="8B9179"/>
                 </a:solidFill>
-                <a:latin typeface="Karla"/>
+                <a:latin typeface="Calibri"/>
               </a:rPr>
               <a:t>The Pastoral Guide</a:t>
             </a:r>
@@ -4070,7 +4070,7 @@
                 <a:solidFill>
                   <a:srgbClr val="8B9179"/>
                 </a:solidFill>
-                <a:latin typeface="Karla"/>
+                <a:latin typeface="Calibri"/>
               </a:rPr>
               <a:t>1 / 27</a:t>
             </a:r>
@@ -4174,7 +4174,7 @@
                 <a:solidFill>
                   <a:srgbClr val="2F5A44"/>
                 </a:solidFill>
-                <a:latin typeface="Karla"/>
+                <a:latin typeface="Calibri"/>
               </a:rPr>
               <a:t>CHRISTMAS QUIZ  ·  ROUND TWO  ·  QUESTION 7 OF 10</a:t>
             </a:r>
@@ -4350,7 +4350,7 @@
                 <a:solidFill>
                   <a:srgbClr val="FFFDF7"/>
                 </a:solidFill>
-                <a:latin typeface="Karla"/>
+                <a:latin typeface="Calibri"/>
               </a:rPr>
               <a:t>7</a:t>
             </a:r>
@@ -4388,11 +4388,11 @@
               </a:spcAft>
             </a:pPr>
             <a:r>
-              <a:rPr sz="2400" b="1" i="0">
+              <a:rPr sz="2400" b="0" i="0">
                 <a:solidFill>
                   <a:srgbClr val="2F5A44"/>
                 </a:solidFill>
-                <a:latin typeface="Libre Caslon Display"/>
+                <a:latin typeface="Georgia"/>
               </a:rPr>
               <a:t>The oldest known record of Christmas on 25 December comes from which year?</a:t>
             </a:r>
@@ -4434,7 +4434,7 @@
                 <a:solidFill>
                   <a:srgbClr val="8B9179"/>
                 </a:solidFill>
-                <a:latin typeface="Karla"/>
+                <a:latin typeface="Calibri"/>
               </a:rPr>
               <a:t>ONE OF THESE</a:t>
             </a:r>
@@ -4610,7 +4610,7 @@
                 <a:solidFill>
                   <a:srgbClr val="FFFDF7"/>
                 </a:solidFill>
-                <a:latin typeface="Karla"/>
+                <a:latin typeface="Calibri"/>
               </a:rPr>
               <a:t>A</a:t>
             </a:r>
@@ -4652,7 +4652,7 @@
                 <a:solidFill>
                   <a:srgbClr val="2E3436"/>
                 </a:solidFill>
-                <a:latin typeface="Karla"/>
+                <a:latin typeface="Calibri"/>
               </a:rPr>
               <a:t>AD 1</a:t>
             </a:r>
@@ -4828,7 +4828,7 @@
                 <a:solidFill>
                   <a:srgbClr val="FFFDF7"/>
                 </a:solidFill>
-                <a:latin typeface="Karla"/>
+                <a:latin typeface="Calibri"/>
               </a:rPr>
               <a:t>B</a:t>
             </a:r>
@@ -4870,7 +4870,7 @@
                 <a:solidFill>
                   <a:srgbClr val="2E3436"/>
                 </a:solidFill>
-                <a:latin typeface="Karla"/>
+                <a:latin typeface="Calibri"/>
               </a:rPr>
               <a:t>AD 354</a:t>
             </a:r>
@@ -5046,7 +5046,7 @@
                 <a:solidFill>
                   <a:srgbClr val="FFFDF7"/>
                 </a:solidFill>
-                <a:latin typeface="Karla"/>
+                <a:latin typeface="Calibri"/>
               </a:rPr>
               <a:t>C</a:t>
             </a:r>
@@ -5088,7 +5088,7 @@
                 <a:solidFill>
                   <a:srgbClr val="2E3436"/>
                 </a:solidFill>
-                <a:latin typeface="Karla"/>
+                <a:latin typeface="Calibri"/>
               </a:rPr>
               <a:t>AD 1066</a:t>
             </a:r>
@@ -5130,7 +5130,7 @@
                 <a:solidFill>
                   <a:srgbClr val="5C6552"/>
                 </a:solidFill>
-                <a:latin typeface="Karla"/>
+                <a:latin typeface="Calibri"/>
               </a:rPr>
               <a:t>Agree it as a team, then tick it on the sheet.</a:t>
             </a:r>
@@ -5196,7 +5196,7 @@
                 <a:solidFill>
                   <a:srgbClr val="8B9179"/>
                 </a:solidFill>
-                <a:latin typeface="Karla"/>
+                <a:latin typeface="Calibri"/>
               </a:rPr>
               <a:t>The Pastoral Guide</a:t>
             </a:r>
@@ -5238,7 +5238,7 @@
                 <a:solidFill>
                   <a:srgbClr val="8B9179"/>
                 </a:solidFill>
-                <a:latin typeface="Karla"/>
+                <a:latin typeface="Calibri"/>
               </a:rPr>
               <a:t>10 / 27</a:t>
             </a:r>
@@ -5342,7 +5342,7 @@
                 <a:solidFill>
                   <a:srgbClr val="2F5A44"/>
                 </a:solidFill>
-                <a:latin typeface="Karla"/>
+                <a:latin typeface="Calibri"/>
               </a:rPr>
               <a:t>CHRISTMAS QUIZ  ·  ROUND TWO  ·  QUESTION 8 OF 10</a:t>
             </a:r>
@@ -5518,7 +5518,7 @@
                 <a:solidFill>
                   <a:srgbClr val="FFFDF7"/>
                 </a:solidFill>
-                <a:latin typeface="Karla"/>
+                <a:latin typeface="Calibri"/>
               </a:rPr>
               <a:t>8</a:t>
             </a:r>
@@ -5556,11 +5556,11 @@
               </a:spcAft>
             </a:pPr>
             <a:r>
-              <a:rPr sz="2400" b="1" i="0">
+              <a:rPr sz="2400" b="0" i="0">
                 <a:solidFill>
                   <a:srgbClr val="2F5A44"/>
                 </a:solidFill>
-                <a:latin typeface="Libre Caslon Display"/>
+                <a:latin typeface="Georgia"/>
               </a:rPr>
               <a:t>In 2023, which country moved its official Christmas Day from 7 January to 25 December?</a:t>
             </a:r>
@@ -5646,7 +5646,7 @@
                 <a:solidFill>
                   <a:srgbClr val="8B9179"/>
                 </a:solidFill>
-                <a:latin typeface="Karla"/>
+                <a:latin typeface="Calibri"/>
               </a:rPr>
               <a:t>Agree it as a team, then write it on the sheet.</a:t>
             </a:r>
@@ -5712,7 +5712,7 @@
                 <a:solidFill>
                   <a:srgbClr val="8B9179"/>
                 </a:solidFill>
-                <a:latin typeface="Karla"/>
+                <a:latin typeface="Calibri"/>
               </a:rPr>
               <a:t>The Pastoral Guide</a:t>
             </a:r>
@@ -5754,7 +5754,7 @@
                 <a:solidFill>
                   <a:srgbClr val="8B9179"/>
                 </a:solidFill>
-                <a:latin typeface="Karla"/>
+                <a:latin typeface="Calibri"/>
               </a:rPr>
               <a:t>11 / 27</a:t>
             </a:r>
@@ -5858,7 +5858,7 @@
                 <a:solidFill>
                   <a:srgbClr val="2F5A44"/>
                 </a:solidFill>
-                <a:latin typeface="Karla"/>
+                <a:latin typeface="Calibri"/>
               </a:rPr>
               <a:t>CHRISTMAS QUIZ  ·  ROUND TWO  ·  QUESTION 9 OF 10</a:t>
             </a:r>
@@ -6034,7 +6034,7 @@
                 <a:solidFill>
                   <a:srgbClr val="FFFDF7"/>
                 </a:solidFill>
-                <a:latin typeface="Karla"/>
+                <a:latin typeface="Calibri"/>
               </a:rPr>
               <a:t>9</a:t>
             </a:r>
@@ -6072,11 +6072,11 @@
               </a:spcAft>
             </a:pPr>
             <a:r>
-              <a:rPr sz="2400" b="1" i="0">
+              <a:rPr sz="2400" b="0" i="0">
                 <a:solidFill>
                   <a:srgbClr val="2F5A44"/>
                 </a:solidFill>
-                <a:latin typeface="Libre Caslon Display"/>
+                <a:latin typeface="Georgia"/>
               </a:rPr>
               <a:t>The French word “Noël” comes from a Latin word meaning what?</a:t>
             </a:r>
@@ -6162,7 +6162,7 @@
                 <a:solidFill>
                   <a:srgbClr val="8B9179"/>
                 </a:solidFill>
-                <a:latin typeface="Karla"/>
+                <a:latin typeface="Calibri"/>
               </a:rPr>
               <a:t>Agree it as a team, then write it on the sheet.</a:t>
             </a:r>
@@ -6228,7 +6228,7 @@
                 <a:solidFill>
                   <a:srgbClr val="8B9179"/>
                 </a:solidFill>
-                <a:latin typeface="Karla"/>
+                <a:latin typeface="Calibri"/>
               </a:rPr>
               <a:t>The Pastoral Guide</a:t>
             </a:r>
@@ -6270,7 +6270,7 @@
                 <a:solidFill>
                   <a:srgbClr val="8B9179"/>
                 </a:solidFill>
-                <a:latin typeface="Karla"/>
+                <a:latin typeface="Calibri"/>
               </a:rPr>
               <a:t>12 / 27</a:t>
             </a:r>
@@ -6374,7 +6374,7 @@
                 <a:solidFill>
                   <a:srgbClr val="2F5A44"/>
                 </a:solidFill>
-                <a:latin typeface="Karla"/>
+                <a:latin typeface="Calibri"/>
               </a:rPr>
               <a:t>CHRISTMAS QUIZ  ·  ROUND TWO  ·  QUESTION 10 OF 10</a:t>
             </a:r>
@@ -6550,7 +6550,7 @@
                 <a:solidFill>
                   <a:srgbClr val="FFFDF7"/>
                 </a:solidFill>
-                <a:latin typeface="Karla"/>
+                <a:latin typeface="Calibri"/>
               </a:rPr>
               <a:t>10</a:t>
             </a:r>
@@ -6588,11 +6588,11 @@
               </a:spcAft>
             </a:pPr>
             <a:r>
-              <a:rPr sz="2400" b="1" i="0">
+              <a:rPr sz="2400" b="0" i="0">
                 <a:solidFill>
                   <a:srgbClr val="2F5A44"/>
                 </a:solidFill>
-                <a:latin typeface="Libre Caslon Display"/>
+                <a:latin typeface="Georgia"/>
               </a:rPr>
               <a:t>Many Orthodox churches celebrate Christmas on 7 January. Which calendar are they following?</a:t>
             </a:r>
@@ -6678,7 +6678,7 @@
                 <a:solidFill>
                   <a:srgbClr val="8B9179"/>
                 </a:solidFill>
-                <a:latin typeface="Karla"/>
+                <a:latin typeface="Calibri"/>
               </a:rPr>
               <a:t>Agree it as a team, then write it on the sheet.</a:t>
             </a:r>
@@ -6744,7 +6744,7 @@
                 <a:solidFill>
                   <a:srgbClr val="8B9179"/>
                 </a:solidFill>
-                <a:latin typeface="Karla"/>
+                <a:latin typeface="Calibri"/>
               </a:rPr>
               <a:t>The Pastoral Guide</a:t>
             </a:r>
@@ -6786,7 +6786,7 @@
                 <a:solidFill>
                   <a:srgbClr val="8B9179"/>
                 </a:solidFill>
-                <a:latin typeface="Karla"/>
+                <a:latin typeface="Calibri"/>
               </a:rPr>
               <a:t>13 / 27</a:t>
             </a:r>
@@ -6903,7 +6903,7 @@
                 <a:solidFill>
                   <a:srgbClr val="2F5A44"/>
                 </a:solidFill>
-                <a:latin typeface="Karla"/>
+                <a:latin typeface="Calibri"/>
               </a:rPr>
               <a:t>ANSWERS</a:t>
             </a:r>
@@ -6941,11 +6941,11 @@
               </a:spcAft>
             </a:pPr>
             <a:r>
-              <a:rPr sz="4000" b="1" i="0">
+              <a:rPr sz="4000" b="0" i="0">
                 <a:solidFill>
                   <a:srgbClr val="FFFDF7"/>
                 </a:solidFill>
-                <a:latin typeface="Libre Caslon Display"/>
+                <a:latin typeface="Georgia"/>
               </a:rPr>
               <a:t>Swap sheets</a:t>
             </a:r>
@@ -7031,7 +7031,7 @@
                 <a:solidFill>
                   <a:srgbClr val="C6D5CA"/>
                 </a:solidFill>
-                <a:latin typeface="Karla"/>
+                <a:latin typeface="Calibri"/>
               </a:rPr>
               <a:t>Swap with the team next to you. Give one mark for each right answer, then add up the score out of ten.</a:t>
             </a:r>
@@ -7097,7 +7097,7 @@
                 <a:solidFill>
                   <a:srgbClr val="C6D5CA"/>
                 </a:solidFill>
-                <a:latin typeface="Karla"/>
+                <a:latin typeface="Calibri"/>
               </a:rPr>
               <a:t>The Pastoral Guide</a:t>
             </a:r>
@@ -7139,7 +7139,7 @@
                 <a:solidFill>
                   <a:srgbClr val="C6D5CA"/>
                 </a:solidFill>
-                <a:latin typeface="Karla"/>
+                <a:latin typeface="Calibri"/>
               </a:rPr>
               <a:t>14 / 27</a:t>
             </a:r>
@@ -7243,7 +7243,7 @@
                 <a:solidFill>
                   <a:srgbClr val="2F5A44"/>
                 </a:solidFill>
-                <a:latin typeface="Karla"/>
+                <a:latin typeface="Calibri"/>
               </a:rPr>
               <a:t>CHRISTMAS QUIZ  ·  ANSWERS  ·  QUESTION 1</a:t>
             </a:r>
@@ -7285,7 +7285,7 @@
                 <a:solidFill>
                   <a:srgbClr val="5C6552"/>
                 </a:solidFill>
-                <a:latin typeface="Karla"/>
+                <a:latin typeface="Calibri"/>
               </a:rPr>
               <a:t>Thanks to Oliver Cromwell, it is still illegal to eat a mince pie on Christmas Day in England.</a:t>
             </a:r>
@@ -7323,11 +7323,11 @@
               </a:spcAft>
             </a:pPr>
             <a:r>
-              <a:rPr sz="3400" b="1" i="0">
+              <a:rPr sz="3400" b="0" i="0">
                 <a:solidFill>
                   <a:srgbClr val="2F5A44"/>
                 </a:solidFill>
-                <a:latin typeface="Libre Caslon Display"/>
+                <a:latin typeface="Georgia"/>
               </a:rPr>
               <a:t>Myth</a:t>
             </a:r>
@@ -7459,7 +7459,7 @@
                 <a:solidFill>
                   <a:srgbClr val="2E3436"/>
                 </a:solidFill>
-                <a:latin typeface="Karla"/>
+                <a:latin typeface="Calibri"/>
               </a:rPr>
               <a:t>Parliament banned Christmas celebrations in 1647, not Cromwell himself, and no law ever named mince pies. The bans ended when the monarchy returned in 1660.</a:t>
             </a:r>
@@ -7525,7 +7525,7 @@
                 <a:solidFill>
                   <a:srgbClr val="8B9179"/>
                 </a:solidFill>
-                <a:latin typeface="Karla"/>
+                <a:latin typeface="Calibri"/>
               </a:rPr>
               <a:t>The Pastoral Guide</a:t>
             </a:r>
@@ -7567,7 +7567,7 @@
                 <a:solidFill>
                   <a:srgbClr val="8B9179"/>
                 </a:solidFill>
-                <a:latin typeface="Karla"/>
+                <a:latin typeface="Calibri"/>
               </a:rPr>
               <a:t>15 / 27</a:t>
             </a:r>
@@ -7671,7 +7671,7 @@
                 <a:solidFill>
                   <a:srgbClr val="2F5A44"/>
                 </a:solidFill>
-                <a:latin typeface="Karla"/>
+                <a:latin typeface="Calibri"/>
               </a:rPr>
               <a:t>CHRISTMAS QUIZ  ·  ANSWERS  ·  QUESTION 2</a:t>
             </a:r>
@@ -7713,7 +7713,7 @@
                 <a:solidFill>
                   <a:srgbClr val="5C6552"/>
                 </a:solidFill>
-                <a:latin typeface="Karla"/>
+                <a:latin typeface="Calibri"/>
               </a:rPr>
               <a:t>Martin Luther invented the Christmas tree.</a:t>
             </a:r>
@@ -7751,11 +7751,11 @@
               </a:spcAft>
             </a:pPr>
             <a:r>
-              <a:rPr sz="3400" b="1" i="0">
+              <a:rPr sz="3400" b="0" i="0">
                 <a:solidFill>
                   <a:srgbClr val="2F5A44"/>
                 </a:solidFill>
-                <a:latin typeface="Libre Caslon Display"/>
+                <a:latin typeface="Georgia"/>
               </a:rPr>
               <a:t>Myth</a:t>
             </a:r>
@@ -7887,7 +7887,7 @@
                 <a:solidFill>
                   <a:srgbClr val="2E3436"/>
                 </a:solidFill>
-                <a:latin typeface="Karla"/>
+                <a:latin typeface="Calibri"/>
               </a:rPr>
               <a:t>The Luther story is a later legend. One of the earliest reliable records is from Sélestat, in Alsace, in 1521, when the town paid guards to protect its fir trees.</a:t>
             </a:r>
@@ -7953,7 +7953,7 @@
                 <a:solidFill>
                   <a:srgbClr val="8B9179"/>
                 </a:solidFill>
-                <a:latin typeface="Karla"/>
+                <a:latin typeface="Calibri"/>
               </a:rPr>
               <a:t>The Pastoral Guide</a:t>
             </a:r>
@@ -7995,7 +7995,7 @@
                 <a:solidFill>
                   <a:srgbClr val="8B9179"/>
                 </a:solidFill>
-                <a:latin typeface="Karla"/>
+                <a:latin typeface="Calibri"/>
               </a:rPr>
               <a:t>16 / 27</a:t>
             </a:r>
@@ -8099,7 +8099,7 @@
                 <a:solidFill>
                   <a:srgbClr val="2F5A44"/>
                 </a:solidFill>
-                <a:latin typeface="Karla"/>
+                <a:latin typeface="Calibri"/>
               </a:rPr>
               <a:t>CHRISTMAS QUIZ  ·  ANSWERS  ·  QUESTION 3</a:t>
             </a:r>
@@ -8141,7 +8141,7 @@
                 <a:solidFill>
                   <a:srgbClr val="5C6552"/>
                 </a:solidFill>
-                <a:latin typeface="Karla"/>
+                <a:latin typeface="Calibri"/>
               </a:rPr>
               <a:t>Armenian Christians in Jerusalem celebrate Christmas on 19 January.</a:t>
             </a:r>
@@ -8179,11 +8179,11 @@
               </a:spcAft>
             </a:pPr>
             <a:r>
-              <a:rPr sz="3400" b="1" i="0">
+              <a:rPr sz="3400" b="0" i="0">
                 <a:solidFill>
                   <a:srgbClr val="2F5A44"/>
                 </a:solidFill>
-                <a:latin typeface="Libre Caslon Display"/>
+                <a:latin typeface="Georgia"/>
               </a:rPr>
               <a:t>Fact</a:t>
             </a:r>
@@ -8315,7 +8315,7 @@
                 <a:solidFill>
                   <a:srgbClr val="2E3436"/>
                 </a:solidFill>
-                <a:latin typeface="Karla"/>
+                <a:latin typeface="Calibri"/>
               </a:rPr>
               <a:t>The Armenian Church keeps Christmas on 6 January, and in Jerusalem it still follows the old Julian calendar. That moves the date to 19 January.</a:t>
             </a:r>
@@ -8381,7 +8381,7 @@
                 <a:solidFill>
                   <a:srgbClr val="8B9179"/>
                 </a:solidFill>
-                <a:latin typeface="Karla"/>
+                <a:latin typeface="Calibri"/>
               </a:rPr>
               <a:t>The Pastoral Guide</a:t>
             </a:r>
@@ -8423,7 +8423,7 @@
                 <a:solidFill>
                   <a:srgbClr val="8B9179"/>
                 </a:solidFill>
-                <a:latin typeface="Karla"/>
+                <a:latin typeface="Calibri"/>
               </a:rPr>
               <a:t>17 / 27</a:t>
             </a:r>
@@ -8527,7 +8527,7 @@
                 <a:solidFill>
                   <a:srgbClr val="2F5A44"/>
                 </a:solidFill>
-                <a:latin typeface="Karla"/>
+                <a:latin typeface="Calibri"/>
               </a:rPr>
               <a:t>CHRISTMAS QUIZ  ·  ANSWERS  ·  QUESTION 4</a:t>
             </a:r>
@@ -8569,7 +8569,7 @@
                 <a:solidFill>
                   <a:srgbClr val="5C6552"/>
                 </a:solidFill>
-                <a:latin typeface="Karla"/>
+                <a:latin typeface="Calibri"/>
               </a:rPr>
               <a:t>The first Christmas card, printed in 1843, caused a row because it showed a child drinking wine.</a:t>
             </a:r>
@@ -8607,11 +8607,11 @@
               </a:spcAft>
             </a:pPr>
             <a:r>
-              <a:rPr sz="3400" b="1" i="0">
+              <a:rPr sz="3400" b="0" i="0">
                 <a:solidFill>
                   <a:srgbClr val="2F5A44"/>
                 </a:solidFill>
-                <a:latin typeface="Libre Caslon Display"/>
+                <a:latin typeface="Georgia"/>
               </a:rPr>
               <a:t>Fact</a:t>
             </a:r>
@@ -8743,7 +8743,7 @@
                 <a:solidFill>
                   <a:srgbClr val="2E3436"/>
                 </a:solidFill>
-                <a:latin typeface="Karla"/>
+                <a:latin typeface="Calibri"/>
               </a:rPr>
               <a:t>Henry Cole had 1,000 printed and sold them for a shilling each. Campaigners against alcohol objected to the picture.</a:t>
             </a:r>
@@ -8809,7 +8809,7 @@
                 <a:solidFill>
                   <a:srgbClr val="8B9179"/>
                 </a:solidFill>
-                <a:latin typeface="Karla"/>
+                <a:latin typeface="Calibri"/>
               </a:rPr>
               <a:t>The Pastoral Guide</a:t>
             </a:r>
@@ -8851,7 +8851,7 @@
                 <a:solidFill>
                   <a:srgbClr val="8B9179"/>
                 </a:solidFill>
-                <a:latin typeface="Karla"/>
+                <a:latin typeface="Calibri"/>
               </a:rPr>
               <a:t>18 / 27</a:t>
             </a:r>
@@ -8955,7 +8955,7 @@
                 <a:solidFill>
                   <a:srgbClr val="2F5A44"/>
                 </a:solidFill>
-                <a:latin typeface="Karla"/>
+                <a:latin typeface="Calibri"/>
               </a:rPr>
               <a:t>CHRISTMAS QUIZ  ·  ANSWERS  ·  QUESTION 5</a:t>
             </a:r>
@@ -8997,7 +8997,7 @@
                 <a:solidFill>
                   <a:srgbClr val="5C6552"/>
                 </a:solidFill>
-                <a:latin typeface="Karla"/>
+                <a:latin typeface="Calibri"/>
               </a:rPr>
               <a:t>An economist found that people value the presents they get at less than they cost. Roughly how much of the value is lost?</a:t>
             </a:r>
@@ -9035,11 +9035,11 @@
               </a:spcAft>
             </a:pPr>
             <a:r>
-              <a:rPr sz="3400" b="1" i="0">
+              <a:rPr sz="3400" b="0" i="0">
                 <a:solidFill>
                   <a:srgbClr val="2F5A44"/>
                 </a:solidFill>
-                <a:latin typeface="Libre Caslon Display"/>
+                <a:latin typeface="Georgia"/>
               </a:rPr>
               <a:t>B.  A tenth to a third</a:t>
             </a:r>
@@ -9171,7 +9171,7 @@
                 <a:solidFill>
                   <a:srgbClr val="2E3436"/>
                 </a:solidFill>
-                <a:latin typeface="Karla"/>
+                <a:latin typeface="Calibri"/>
               </a:rPr>
               <a:t>Joel Waldfogel called it the deadweight loss of Christmas, in a study from 1993. Cash avoids the loss, because nobody values it at less than it is worth.</a:t>
             </a:r>
@@ -9237,7 +9237,7 @@
                 <a:solidFill>
                   <a:srgbClr val="8B9179"/>
                 </a:solidFill>
-                <a:latin typeface="Karla"/>
+                <a:latin typeface="Calibri"/>
               </a:rPr>
               <a:t>The Pastoral Guide</a:t>
             </a:r>
@@ -9279,7 +9279,7 @@
                 <a:solidFill>
                   <a:srgbClr val="8B9179"/>
                 </a:solidFill>
-                <a:latin typeface="Karla"/>
+                <a:latin typeface="Calibri"/>
               </a:rPr>
               <a:t>19 / 27</a:t>
             </a:r>
@@ -9396,7 +9396,7 @@
                 <a:solidFill>
                   <a:srgbClr val="2F5A44"/>
                 </a:solidFill>
-                <a:latin typeface="Karla"/>
+                <a:latin typeface="Calibri"/>
               </a:rPr>
               <a:t>ROUND ONE</a:t>
             </a:r>
@@ -9434,11 +9434,11 @@
               </a:spcAft>
             </a:pPr>
             <a:r>
-              <a:rPr sz="4000" b="1" i="0">
+              <a:rPr sz="4000" b="0" i="0">
                 <a:solidFill>
                   <a:srgbClr val="FFFDF7"/>
                 </a:solidFill>
-                <a:latin typeface="Libre Caslon Display"/>
+                <a:latin typeface="Georgia"/>
               </a:rPr>
               <a:t>Fact or myth</a:t>
             </a:r>
@@ -9524,7 +9524,7 @@
                 <a:solidFill>
                   <a:srgbClr val="C6D5CA"/>
                 </a:solidFill>
-                <a:latin typeface="Karla"/>
+                <a:latin typeface="Calibri"/>
               </a:rPr>
               <a:t>Four statements about Christmas. As a team, decide whether each one is a fact or a myth.</a:t>
             </a:r>
@@ -9590,7 +9590,7 @@
                 <a:solidFill>
                   <a:srgbClr val="C6D5CA"/>
                 </a:solidFill>
-                <a:latin typeface="Karla"/>
+                <a:latin typeface="Calibri"/>
               </a:rPr>
               <a:t>The Pastoral Guide</a:t>
             </a:r>
@@ -9632,7 +9632,7 @@
                 <a:solidFill>
                   <a:srgbClr val="C6D5CA"/>
                 </a:solidFill>
-                <a:latin typeface="Karla"/>
+                <a:latin typeface="Calibri"/>
               </a:rPr>
               <a:t>2 / 27</a:t>
             </a:r>
@@ -9736,7 +9736,7 @@
                 <a:solidFill>
                   <a:srgbClr val="2F5A44"/>
                 </a:solidFill>
-                <a:latin typeface="Karla"/>
+                <a:latin typeface="Calibri"/>
               </a:rPr>
               <a:t>CHRISTMAS QUIZ  ·  ANSWERS  ·  QUESTION 6</a:t>
             </a:r>
@@ -9778,7 +9778,7 @@
                 <a:solidFill>
                   <a:srgbClr val="5C6552"/>
                 </a:solidFill>
-                <a:latin typeface="Karla"/>
+                <a:latin typeface="Calibri"/>
               </a:rPr>
               <a:t>How many candles were on the first Advent wreath, in 1839?</a:t>
             </a:r>
@@ -9816,11 +9816,11 @@
               </a:spcAft>
             </a:pPr>
             <a:r>
-              <a:rPr sz="3400" b="1" i="0">
+              <a:rPr sz="3400" b="0" i="0">
                 <a:solidFill>
                   <a:srgbClr val="2F5A44"/>
                 </a:solidFill>
-                <a:latin typeface="Libre Caslon Display"/>
+                <a:latin typeface="Georgia"/>
               </a:rPr>
               <a:t>C.  28</a:t>
             </a:r>
@@ -9952,7 +9952,7 @@
                 <a:solidFill>
                   <a:srgbClr val="2E3436"/>
                 </a:solidFill>
-                <a:latin typeface="Karla"/>
+                <a:latin typeface="Calibri"/>
               </a:rPr>
               <a:t>A pastor in Hamburg put 24 small and 4 large candles on a cartwheel, because the children at his school kept asking how long it was until Christmas.</a:t>
             </a:r>
@@ -10018,7 +10018,7 @@
                 <a:solidFill>
                   <a:srgbClr val="8B9179"/>
                 </a:solidFill>
-                <a:latin typeface="Karla"/>
+                <a:latin typeface="Calibri"/>
               </a:rPr>
               <a:t>The Pastoral Guide</a:t>
             </a:r>
@@ -10060,7 +10060,7 @@
                 <a:solidFill>
                   <a:srgbClr val="8B9179"/>
                 </a:solidFill>
-                <a:latin typeface="Karla"/>
+                <a:latin typeface="Calibri"/>
               </a:rPr>
               <a:t>20 / 27</a:t>
             </a:r>
@@ -10164,7 +10164,7 @@
                 <a:solidFill>
                   <a:srgbClr val="2F5A44"/>
                 </a:solidFill>
-                <a:latin typeface="Karla"/>
+                <a:latin typeface="Calibri"/>
               </a:rPr>
               <a:t>CHRISTMAS QUIZ  ·  ANSWERS  ·  QUESTION 7</a:t>
             </a:r>
@@ -10206,7 +10206,7 @@
                 <a:solidFill>
                   <a:srgbClr val="5C6552"/>
                 </a:solidFill>
-                <a:latin typeface="Karla"/>
+                <a:latin typeface="Calibri"/>
               </a:rPr>
               <a:t>The oldest known record of Christmas on 25 December comes from which year?</a:t>
             </a:r>
@@ -10244,11 +10244,11 @@
               </a:spcAft>
             </a:pPr>
             <a:r>
-              <a:rPr sz="3400" b="1" i="0">
+              <a:rPr sz="3400" b="0" i="0">
                 <a:solidFill>
                   <a:srgbClr val="2F5A44"/>
                 </a:solidFill>
-                <a:latin typeface="Libre Caslon Display"/>
+                <a:latin typeface="Georgia"/>
               </a:rPr>
               <a:t>B.  AD 354</a:t>
             </a:r>
@@ -10380,7 +10380,7 @@
                 <a:solidFill>
                   <a:srgbClr val="2E3436"/>
                 </a:solidFill>
-                <a:latin typeface="Karla"/>
+                <a:latin typeface="Calibri"/>
               </a:rPr>
               <a:t>It is in a Roman calendar called the Chronograph of 354. Nobody knows the actual date Jesus was born.</a:t>
             </a:r>
@@ -10446,7 +10446,7 @@
                 <a:solidFill>
                   <a:srgbClr val="8B9179"/>
                 </a:solidFill>
-                <a:latin typeface="Karla"/>
+                <a:latin typeface="Calibri"/>
               </a:rPr>
               <a:t>The Pastoral Guide</a:t>
             </a:r>
@@ -10488,7 +10488,7 @@
                 <a:solidFill>
                   <a:srgbClr val="8B9179"/>
                 </a:solidFill>
-                <a:latin typeface="Karla"/>
+                <a:latin typeface="Calibri"/>
               </a:rPr>
               <a:t>21 / 27</a:t>
             </a:r>
@@ -10592,7 +10592,7 @@
                 <a:solidFill>
                   <a:srgbClr val="2F5A44"/>
                 </a:solidFill>
-                <a:latin typeface="Karla"/>
+                <a:latin typeface="Calibri"/>
               </a:rPr>
               <a:t>CHRISTMAS QUIZ  ·  ANSWERS  ·  QUESTION 8</a:t>
             </a:r>
@@ -10634,7 +10634,7 @@
                 <a:solidFill>
                   <a:srgbClr val="5C6552"/>
                 </a:solidFill>
-                <a:latin typeface="Karla"/>
+                <a:latin typeface="Calibri"/>
               </a:rPr>
               <a:t>In 2023, which country moved its official Christmas Day from 7 January to 25 December?</a:t>
             </a:r>
@@ -10672,11 +10672,11 @@
               </a:spcAft>
             </a:pPr>
             <a:r>
-              <a:rPr sz="3400" b="1" i="0">
+              <a:rPr sz="3400" b="0" i="0">
                 <a:solidFill>
                   <a:srgbClr val="2F5A44"/>
                 </a:solidFill>
-                <a:latin typeface="Libre Caslon Display"/>
+                <a:latin typeface="Georgia"/>
               </a:rPr>
               <a:t>Ukraine</a:t>
             </a:r>
@@ -10808,7 +10808,7 @@
                 <a:solidFill>
                   <a:srgbClr val="2E3436"/>
                 </a:solidFill>
-                <a:latin typeface="Karla"/>
+                <a:latin typeface="Calibri"/>
               </a:rPr>
               <a:t>The law was signed in July 2023. The government said it was to move away from the Russian tradition.</a:t>
             </a:r>
@@ -10874,7 +10874,7 @@
                 <a:solidFill>
                   <a:srgbClr val="8B9179"/>
                 </a:solidFill>
-                <a:latin typeface="Karla"/>
+                <a:latin typeface="Calibri"/>
               </a:rPr>
               <a:t>The Pastoral Guide</a:t>
             </a:r>
@@ -10916,7 +10916,7 @@
                 <a:solidFill>
                   <a:srgbClr val="8B9179"/>
                 </a:solidFill>
-                <a:latin typeface="Karla"/>
+                <a:latin typeface="Calibri"/>
               </a:rPr>
               <a:t>22 / 27</a:t>
             </a:r>
@@ -11020,7 +11020,7 @@
                 <a:solidFill>
                   <a:srgbClr val="2F5A44"/>
                 </a:solidFill>
-                <a:latin typeface="Karla"/>
+                <a:latin typeface="Calibri"/>
               </a:rPr>
               <a:t>CHRISTMAS QUIZ  ·  ANSWERS  ·  QUESTION 9</a:t>
             </a:r>
@@ -11062,7 +11062,7 @@
                 <a:solidFill>
                   <a:srgbClr val="5C6552"/>
                 </a:solidFill>
-                <a:latin typeface="Karla"/>
+                <a:latin typeface="Calibri"/>
               </a:rPr>
               <a:t>The French word “Noël” comes from a Latin word meaning what?</a:t>
             </a:r>
@@ -11100,11 +11100,11 @@
               </a:spcAft>
             </a:pPr>
             <a:r>
-              <a:rPr sz="3400" b="1" i="0">
+              <a:rPr sz="3400" b="0" i="0">
                 <a:solidFill>
                   <a:srgbClr val="2F5A44"/>
                 </a:solidFill>
-                <a:latin typeface="Libre Caslon Display"/>
+                <a:latin typeface="Georgia"/>
               </a:rPr>
               <a:t>Birth</a:t>
             </a:r>
@@ -11236,7 +11236,7 @@
                 <a:solidFill>
                   <a:srgbClr val="2E3436"/>
                 </a:solidFill>
-                <a:latin typeface="Karla"/>
+                <a:latin typeface="Calibri"/>
               </a:rPr>
               <a:t>The Latin word is “natalis”. It shares a root with English words like “natal” and “native”.</a:t>
             </a:r>
@@ -11302,7 +11302,7 @@
                 <a:solidFill>
                   <a:srgbClr val="8B9179"/>
                 </a:solidFill>
-                <a:latin typeface="Karla"/>
+                <a:latin typeface="Calibri"/>
               </a:rPr>
               <a:t>The Pastoral Guide</a:t>
             </a:r>
@@ -11344,7 +11344,7 @@
                 <a:solidFill>
                   <a:srgbClr val="8B9179"/>
                 </a:solidFill>
-                <a:latin typeface="Karla"/>
+                <a:latin typeface="Calibri"/>
               </a:rPr>
               <a:t>23 / 27</a:t>
             </a:r>
@@ -11448,7 +11448,7 @@
                 <a:solidFill>
                   <a:srgbClr val="2F5A44"/>
                 </a:solidFill>
-                <a:latin typeface="Karla"/>
+                <a:latin typeface="Calibri"/>
               </a:rPr>
               <a:t>CHRISTMAS QUIZ  ·  ANSWERS  ·  QUESTION 10</a:t>
             </a:r>
@@ -11490,7 +11490,7 @@
                 <a:solidFill>
                   <a:srgbClr val="5C6552"/>
                 </a:solidFill>
-                <a:latin typeface="Karla"/>
+                <a:latin typeface="Calibri"/>
               </a:rPr>
               <a:t>Many Orthodox churches celebrate Christmas on 7 January. Which calendar are they following?</a:t>
             </a:r>
@@ -11528,11 +11528,11 @@
               </a:spcAft>
             </a:pPr>
             <a:r>
-              <a:rPr sz="3400" b="1" i="0">
+              <a:rPr sz="3400" b="0" i="0">
                 <a:solidFill>
                   <a:srgbClr val="2F5A44"/>
                 </a:solidFill>
-                <a:latin typeface="Libre Caslon Display"/>
+                <a:latin typeface="Georgia"/>
               </a:rPr>
               <a:t>The Julian calendar</a:t>
             </a:r>
@@ -11664,7 +11664,7 @@
                 <a:solidFill>
                   <a:srgbClr val="2E3436"/>
                 </a:solidFill>
-                <a:latin typeface="Karla"/>
+                <a:latin typeface="Calibri"/>
               </a:rPr>
               <a:t>On the Julian calendar, 7 January is still 25 December. It is 13 days behind the calendar most of the world uses now, and the gap grows to 14 days in 2100.</a:t>
             </a:r>
@@ -11730,7 +11730,7 @@
                 <a:solidFill>
                   <a:srgbClr val="8B9179"/>
                 </a:solidFill>
-                <a:latin typeface="Karla"/>
+                <a:latin typeface="Calibri"/>
               </a:rPr>
               <a:t>The Pastoral Guide</a:t>
             </a:r>
@@ -11772,7 +11772,7 @@
                 <a:solidFill>
                   <a:srgbClr val="8B9179"/>
                 </a:solidFill>
-                <a:latin typeface="Karla"/>
+                <a:latin typeface="Calibri"/>
               </a:rPr>
               <a:t>24 / 27</a:t>
             </a:r>
@@ -11876,7 +11876,7 @@
                 <a:solidFill>
                   <a:srgbClr val="2F5A44"/>
                 </a:solidFill>
-                <a:latin typeface="Karla"/>
+                <a:latin typeface="Calibri"/>
               </a:rPr>
               <a:t>THE FORM TIME QUIZ  ·  CHRISTMAS EDITION</a:t>
             </a:r>
@@ -11938,11 +11938,11 @@
               </a:spcAft>
             </a:pPr>
             <a:r>
-              <a:rPr sz="3200" b="1" i="0">
+              <a:rPr sz="3200" b="0" i="0">
                 <a:solidFill>
                   <a:srgbClr val="2F5A44"/>
                 </a:solidFill>
-                <a:latin typeface="Libre Caslon Display"/>
+                <a:latin typeface="Georgia"/>
               </a:rPr>
               <a:t>Scores back to their owners</a:t>
             </a:r>
@@ -11984,7 +11984,7 @@
                 <a:solidFill>
                   <a:srgbClr val="5C6552"/>
                 </a:solidFill>
-                <a:latin typeface="Karla"/>
+                <a:latin typeface="Calibri"/>
               </a:rPr>
               <a:t>Hands up if you got ten. Then hands up if one of the answers surprised you, and tell us which.</a:t>
             </a:r>
@@ -12026,7 +12026,7 @@
                 <a:solidFill>
                   <a:srgbClr val="8B9179"/>
                 </a:solidFill>
-                <a:latin typeface="Karla"/>
+                <a:latin typeface="Calibri"/>
               </a:rPr>
               <a:t>More free quizzes and form time activities at thepastoralguide.com.</a:t>
             </a:r>
@@ -12092,7 +12092,7 @@
                 <a:solidFill>
                   <a:srgbClr val="8B9179"/>
                 </a:solidFill>
-                <a:latin typeface="Karla"/>
+                <a:latin typeface="Calibri"/>
               </a:rPr>
               <a:t>The Pastoral Guide</a:t>
             </a:r>
@@ -12134,7 +12134,7 @@
                 <a:solidFill>
                   <a:srgbClr val="8B9179"/>
                 </a:solidFill>
-                <a:latin typeface="Karla"/>
+                <a:latin typeface="Calibri"/>
               </a:rPr>
               <a:t>25 / 27</a:t>
             </a:r>
@@ -12251,7 +12251,7 @@
                 <a:solidFill>
                   <a:srgbClr val="963A36"/>
                 </a:solidFill>
-                <a:latin typeface="Karla"/>
+                <a:latin typeface="Calibri"/>
               </a:rPr>
               <a:t>FOR THE TEACHER  ·  ADD YOUR OWN</a:t>
             </a:r>
@@ -12427,7 +12427,7 @@
                 <a:solidFill>
                   <a:srgbClr val="FFFDF7"/>
                 </a:solidFill>
-                <a:latin typeface="Karla"/>
+                <a:latin typeface="Calibri"/>
               </a:rPr>
               <a:t>?</a:t>
             </a:r>
@@ -12465,11 +12465,11 @@
               </a:spcAft>
             </a:pPr>
             <a:r>
-              <a:rPr sz="2400" b="1" i="0">
+              <a:rPr sz="2400" b="0" i="0">
                 <a:solidFill>
                   <a:srgbClr val="2F5A44"/>
                 </a:solidFill>
-                <a:latin typeface="Libre Caslon Display"/>
+                <a:latin typeface="Georgia"/>
               </a:rPr>
               <a:t>[ Type your own question here ]</a:t>
             </a:r>
@@ -12511,7 +12511,7 @@
                 <a:solidFill>
                   <a:srgbClr val="5C6552"/>
                 </a:solidFill>
-                <a:latin typeface="Karla"/>
+                <a:latin typeface="Calibri"/>
               </a:rPr>
               <a:t>Add your own questions here: something from assembly, a date coming up, or a question about your own school.</a:t>
             </a:r>
@@ -12533,7 +12533,7 @@
                 <a:solidFill>
                   <a:srgbClr val="5C6552"/>
                 </a:solidFill>
-                <a:latin typeface="Karla"/>
+                <a:latin typeface="Calibri"/>
               </a:rPr>
               <a:t>Duplicate this slide for each one and drag it in after question 10. There are two spare rows on the answer sheet for them.</a:t>
             </a:r>
@@ -12599,7 +12599,7 @@
                 <a:solidFill>
                   <a:srgbClr val="8B9179"/>
                 </a:solidFill>
-                <a:latin typeface="Karla"/>
+                <a:latin typeface="Calibri"/>
               </a:rPr>
               <a:t>The Pastoral Guide</a:t>
             </a:r>
@@ -12641,7 +12641,7 @@
                 <a:solidFill>
                   <a:srgbClr val="8B9179"/>
                 </a:solidFill>
-                <a:latin typeface="Karla"/>
+                <a:latin typeface="Calibri"/>
               </a:rPr>
               <a:t>26 / 27</a:t>
             </a:r>
@@ -12758,7 +12758,7 @@
                 <a:solidFill>
                   <a:srgbClr val="963A36"/>
                 </a:solidFill>
-                <a:latin typeface="Karla"/>
+                <a:latin typeface="Calibri"/>
               </a:rPr>
               <a:t>FOR THE TEACHER  ·  ADD YOUR OWN</a:t>
             </a:r>
@@ -12800,7 +12800,7 @@
                 <a:solidFill>
                   <a:srgbClr val="5C6552"/>
                 </a:solidFill>
-                <a:latin typeface="Karla"/>
+                <a:latin typeface="Calibri"/>
               </a:rPr>
               <a:t>[ Your question again, so the room remembers it ]</a:t>
             </a:r>
@@ -12838,11 +12838,11 @@
               </a:spcAft>
             </a:pPr>
             <a:r>
-              <a:rPr sz="3400" b="1" i="0">
+              <a:rPr sz="3400" b="0" i="0">
                 <a:solidFill>
                   <a:srgbClr val="2F5A44"/>
                 </a:solidFill>
-                <a:latin typeface="Libre Caslon Display"/>
+                <a:latin typeface="Georgia"/>
               </a:rPr>
               <a:t>[ The answer ]</a:t>
             </a:r>
@@ -12974,7 +12974,7 @@
                 <a:solidFill>
                   <a:srgbClr val="2E3436"/>
                 </a:solidFill>
-                <a:latin typeface="Karla"/>
+                <a:latin typeface="Calibri"/>
               </a:rPr>
               <a:t>[ One line on why, if there is something worth knowing ]</a:t>
             </a:r>
@@ -13016,7 +13016,7 @@
                 <a:solidFill>
                   <a:srgbClr val="5C6552"/>
                 </a:solidFill>
-                <a:latin typeface="Karla"/>
+                <a:latin typeface="Calibri"/>
               </a:rPr>
               <a:t>Duplicate this slide for each of your own questions and drag it in after the answer to question 10.</a:t>
             </a:r>
@@ -13082,7 +13082,7 @@
                 <a:solidFill>
                   <a:srgbClr val="8B9179"/>
                 </a:solidFill>
-                <a:latin typeface="Karla"/>
+                <a:latin typeface="Calibri"/>
               </a:rPr>
               <a:t>The Pastoral Guide</a:t>
             </a:r>
@@ -13124,7 +13124,7 @@
                 <a:solidFill>
                   <a:srgbClr val="8B9179"/>
                 </a:solidFill>
-                <a:latin typeface="Karla"/>
+                <a:latin typeface="Calibri"/>
               </a:rPr>
               <a:t>27 / 27</a:t>
             </a:r>
@@ -13228,7 +13228,7 @@
                 <a:solidFill>
                   <a:srgbClr val="2F5A44"/>
                 </a:solidFill>
-                <a:latin typeface="Karla"/>
+                <a:latin typeface="Calibri"/>
               </a:rPr>
               <a:t>CHRISTMAS QUIZ  ·  ROUND ONE  ·  QUESTION 1 OF 10</a:t>
             </a:r>
@@ -13404,7 +13404,7 @@
                 <a:solidFill>
                   <a:srgbClr val="FFFDF7"/>
                 </a:solidFill>
-                <a:latin typeface="Karla"/>
+                <a:latin typeface="Calibri"/>
               </a:rPr>
               <a:t>1</a:t>
             </a:r>
@@ -13442,11 +13442,11 @@
               </a:spcAft>
             </a:pPr>
             <a:r>
-              <a:rPr sz="2400" b="1" i="0">
+              <a:rPr sz="2400" b="0" i="0">
                 <a:solidFill>
                   <a:srgbClr val="2F5A44"/>
                 </a:solidFill>
-                <a:latin typeface="Libre Caslon Display"/>
+                <a:latin typeface="Georgia"/>
               </a:rPr>
               <a:t>Thanks to Oliver Cromwell, it is still illegal to eat a mince pie on Christmas Day in England.</a:t>
             </a:r>
@@ -13488,7 +13488,7 @@
                 <a:solidFill>
                   <a:srgbClr val="8B9179"/>
                 </a:solidFill>
-                <a:latin typeface="Karla"/>
+                <a:latin typeface="Calibri"/>
               </a:rPr>
               <a:t>FACT OR MYTH?</a:t>
             </a:r>
@@ -13616,11 +13616,11 @@
               </a:spcAft>
             </a:pPr>
             <a:r>
-              <a:rPr sz="2000" b="1" i="0">
+              <a:rPr sz="2000" b="0" i="0">
                 <a:solidFill>
                   <a:srgbClr val="2F5A44"/>
                 </a:solidFill>
-                <a:latin typeface="Libre Caslon Display"/>
+                <a:latin typeface="Georgia"/>
               </a:rPr>
               <a:t>Fact</a:t>
             </a:r>
@@ -13748,11 +13748,11 @@
               </a:spcAft>
             </a:pPr>
             <a:r>
-              <a:rPr sz="2000" b="1" i="0">
+              <a:rPr sz="2000" b="0" i="0">
                 <a:solidFill>
                   <a:srgbClr val="2F5A44"/>
                 </a:solidFill>
-                <a:latin typeface="Libre Caslon Display"/>
+                <a:latin typeface="Georgia"/>
               </a:rPr>
               <a:t>Myth</a:t>
             </a:r>
@@ -13794,7 +13794,7 @@
                 <a:solidFill>
                   <a:srgbClr val="5C6552"/>
                 </a:solidFill>
-                <a:latin typeface="Karla"/>
+                <a:latin typeface="Calibri"/>
               </a:rPr>
               <a:t>Agree it as a team, then tick it on the sheet.</a:t>
             </a:r>
@@ -13860,7 +13860,7 @@
                 <a:solidFill>
                   <a:srgbClr val="8B9179"/>
                 </a:solidFill>
-                <a:latin typeface="Karla"/>
+                <a:latin typeface="Calibri"/>
               </a:rPr>
               <a:t>The Pastoral Guide</a:t>
             </a:r>
@@ -13902,7 +13902,7 @@
                 <a:solidFill>
                   <a:srgbClr val="8B9179"/>
                 </a:solidFill>
-                <a:latin typeface="Karla"/>
+                <a:latin typeface="Calibri"/>
               </a:rPr>
               <a:t>3 / 27</a:t>
             </a:r>
@@ -14006,7 +14006,7 @@
                 <a:solidFill>
                   <a:srgbClr val="2F5A44"/>
                 </a:solidFill>
-                <a:latin typeface="Karla"/>
+                <a:latin typeface="Calibri"/>
               </a:rPr>
               <a:t>CHRISTMAS QUIZ  ·  ROUND ONE  ·  QUESTION 2 OF 10</a:t>
             </a:r>
@@ -14182,7 +14182,7 @@
                 <a:solidFill>
                   <a:srgbClr val="FFFDF7"/>
                 </a:solidFill>
-                <a:latin typeface="Karla"/>
+                <a:latin typeface="Calibri"/>
               </a:rPr>
               <a:t>2</a:t>
             </a:r>
@@ -14220,11 +14220,11 @@
               </a:spcAft>
             </a:pPr>
             <a:r>
-              <a:rPr sz="2400" b="1" i="0">
+              <a:rPr sz="2400" b="0" i="0">
                 <a:solidFill>
                   <a:srgbClr val="2F5A44"/>
                 </a:solidFill>
-                <a:latin typeface="Libre Caslon Display"/>
+                <a:latin typeface="Georgia"/>
               </a:rPr>
               <a:t>Martin Luther invented the Christmas tree.</a:t>
             </a:r>
@@ -14266,7 +14266,7 @@
                 <a:solidFill>
                   <a:srgbClr val="8B9179"/>
                 </a:solidFill>
-                <a:latin typeface="Karla"/>
+                <a:latin typeface="Calibri"/>
               </a:rPr>
               <a:t>FACT OR MYTH?</a:t>
             </a:r>
@@ -14394,11 +14394,11 @@
               </a:spcAft>
             </a:pPr>
             <a:r>
-              <a:rPr sz="2000" b="1" i="0">
+              <a:rPr sz="2000" b="0" i="0">
                 <a:solidFill>
                   <a:srgbClr val="2F5A44"/>
                 </a:solidFill>
-                <a:latin typeface="Libre Caslon Display"/>
+                <a:latin typeface="Georgia"/>
               </a:rPr>
               <a:t>Fact</a:t>
             </a:r>
@@ -14526,11 +14526,11 @@
               </a:spcAft>
             </a:pPr>
             <a:r>
-              <a:rPr sz="2000" b="1" i="0">
+              <a:rPr sz="2000" b="0" i="0">
                 <a:solidFill>
                   <a:srgbClr val="2F5A44"/>
                 </a:solidFill>
-                <a:latin typeface="Libre Caslon Display"/>
+                <a:latin typeface="Georgia"/>
               </a:rPr>
               <a:t>Myth</a:t>
             </a:r>
@@ -14572,7 +14572,7 @@
                 <a:solidFill>
                   <a:srgbClr val="5C6552"/>
                 </a:solidFill>
-                <a:latin typeface="Karla"/>
+                <a:latin typeface="Calibri"/>
               </a:rPr>
               <a:t>Agree it as a team, then tick it on the sheet.</a:t>
             </a:r>
@@ -14638,7 +14638,7 @@
                 <a:solidFill>
                   <a:srgbClr val="8B9179"/>
                 </a:solidFill>
-                <a:latin typeface="Karla"/>
+                <a:latin typeface="Calibri"/>
               </a:rPr>
               <a:t>The Pastoral Guide</a:t>
             </a:r>
@@ -14680,7 +14680,7 @@
                 <a:solidFill>
                   <a:srgbClr val="8B9179"/>
                 </a:solidFill>
-                <a:latin typeface="Karla"/>
+                <a:latin typeface="Calibri"/>
               </a:rPr>
               <a:t>4 / 27</a:t>
             </a:r>
@@ -14784,7 +14784,7 @@
                 <a:solidFill>
                   <a:srgbClr val="2F5A44"/>
                 </a:solidFill>
-                <a:latin typeface="Karla"/>
+                <a:latin typeface="Calibri"/>
               </a:rPr>
               <a:t>CHRISTMAS QUIZ  ·  ROUND ONE  ·  QUESTION 3 OF 10</a:t>
             </a:r>
@@ -14960,7 +14960,7 @@
                 <a:solidFill>
                   <a:srgbClr val="FFFDF7"/>
                 </a:solidFill>
-                <a:latin typeface="Karla"/>
+                <a:latin typeface="Calibri"/>
               </a:rPr>
               <a:t>3</a:t>
             </a:r>
@@ -14998,11 +14998,11 @@
               </a:spcAft>
             </a:pPr>
             <a:r>
-              <a:rPr sz="2400" b="1" i="0">
+              <a:rPr sz="2400" b="0" i="0">
                 <a:solidFill>
                   <a:srgbClr val="2F5A44"/>
                 </a:solidFill>
-                <a:latin typeface="Libre Caslon Display"/>
+                <a:latin typeface="Georgia"/>
               </a:rPr>
               <a:t>Armenian Christians in Jerusalem celebrate Christmas on 19 January.</a:t>
             </a:r>
@@ -15044,7 +15044,7 @@
                 <a:solidFill>
                   <a:srgbClr val="8B9179"/>
                 </a:solidFill>
-                <a:latin typeface="Karla"/>
+                <a:latin typeface="Calibri"/>
               </a:rPr>
               <a:t>FACT OR MYTH?</a:t>
             </a:r>
@@ -15172,11 +15172,11 @@
               </a:spcAft>
             </a:pPr>
             <a:r>
-              <a:rPr sz="2000" b="1" i="0">
+              <a:rPr sz="2000" b="0" i="0">
                 <a:solidFill>
                   <a:srgbClr val="2F5A44"/>
                 </a:solidFill>
-                <a:latin typeface="Libre Caslon Display"/>
+                <a:latin typeface="Georgia"/>
               </a:rPr>
               <a:t>Fact</a:t>
             </a:r>
@@ -15304,11 +15304,11 @@
               </a:spcAft>
             </a:pPr>
             <a:r>
-              <a:rPr sz="2000" b="1" i="0">
+              <a:rPr sz="2000" b="0" i="0">
                 <a:solidFill>
                   <a:srgbClr val="2F5A44"/>
                 </a:solidFill>
-                <a:latin typeface="Libre Caslon Display"/>
+                <a:latin typeface="Georgia"/>
               </a:rPr>
               <a:t>Myth</a:t>
             </a:r>
@@ -15350,7 +15350,7 @@
                 <a:solidFill>
                   <a:srgbClr val="5C6552"/>
                 </a:solidFill>
-                <a:latin typeface="Karla"/>
+                <a:latin typeface="Calibri"/>
               </a:rPr>
               <a:t>Agree it as a team, then tick it on the sheet.</a:t>
             </a:r>
@@ -15416,7 +15416,7 @@
                 <a:solidFill>
                   <a:srgbClr val="8B9179"/>
                 </a:solidFill>
-                <a:latin typeface="Karla"/>
+                <a:latin typeface="Calibri"/>
               </a:rPr>
               <a:t>The Pastoral Guide</a:t>
             </a:r>
@@ -15458,7 +15458,7 @@
                 <a:solidFill>
                   <a:srgbClr val="8B9179"/>
                 </a:solidFill>
-                <a:latin typeface="Karla"/>
+                <a:latin typeface="Calibri"/>
               </a:rPr>
               <a:t>5 / 27</a:t>
             </a:r>
@@ -15562,7 +15562,7 @@
                 <a:solidFill>
                   <a:srgbClr val="2F5A44"/>
                 </a:solidFill>
-                <a:latin typeface="Karla"/>
+                <a:latin typeface="Calibri"/>
               </a:rPr>
               <a:t>CHRISTMAS QUIZ  ·  ROUND ONE  ·  QUESTION 4 OF 10</a:t>
             </a:r>
@@ -15738,7 +15738,7 @@
                 <a:solidFill>
                   <a:srgbClr val="FFFDF7"/>
                 </a:solidFill>
-                <a:latin typeface="Karla"/>
+                <a:latin typeface="Calibri"/>
               </a:rPr>
               <a:t>4</a:t>
             </a:r>
@@ -15776,11 +15776,11 @@
               </a:spcAft>
             </a:pPr>
             <a:r>
-              <a:rPr sz="2400" b="1" i="0">
+              <a:rPr sz="2400" b="0" i="0">
                 <a:solidFill>
                   <a:srgbClr val="2F5A44"/>
                 </a:solidFill>
-                <a:latin typeface="Libre Caslon Display"/>
+                <a:latin typeface="Georgia"/>
               </a:rPr>
               <a:t>The first Christmas card, printed in 1843, caused a row because it showed a child drinking wine.</a:t>
             </a:r>
@@ -15822,7 +15822,7 @@
                 <a:solidFill>
                   <a:srgbClr val="8B9179"/>
                 </a:solidFill>
-                <a:latin typeface="Karla"/>
+                <a:latin typeface="Calibri"/>
               </a:rPr>
               <a:t>FACT OR MYTH?</a:t>
             </a:r>
@@ -15950,11 +15950,11 @@
               </a:spcAft>
             </a:pPr>
             <a:r>
-              <a:rPr sz="2000" b="1" i="0">
+              <a:rPr sz="2000" b="0" i="0">
                 <a:solidFill>
                   <a:srgbClr val="2F5A44"/>
                 </a:solidFill>
-                <a:latin typeface="Libre Caslon Display"/>
+                <a:latin typeface="Georgia"/>
               </a:rPr>
               <a:t>Fact</a:t>
             </a:r>
@@ -16082,11 +16082,11 @@
               </a:spcAft>
             </a:pPr>
             <a:r>
-              <a:rPr sz="2000" b="1" i="0">
+              <a:rPr sz="2000" b="0" i="0">
                 <a:solidFill>
                   <a:srgbClr val="2F5A44"/>
                 </a:solidFill>
-                <a:latin typeface="Libre Caslon Display"/>
+                <a:latin typeface="Georgia"/>
               </a:rPr>
               <a:t>Myth</a:t>
             </a:r>
@@ -16128,7 +16128,7 @@
                 <a:solidFill>
                   <a:srgbClr val="5C6552"/>
                 </a:solidFill>
-                <a:latin typeface="Karla"/>
+                <a:latin typeface="Calibri"/>
               </a:rPr>
               <a:t>Agree it as a team, then tick it on the sheet.</a:t>
             </a:r>
@@ -16194,7 +16194,7 @@
                 <a:solidFill>
                   <a:srgbClr val="8B9179"/>
                 </a:solidFill>
-                <a:latin typeface="Karla"/>
+                <a:latin typeface="Calibri"/>
               </a:rPr>
               <a:t>The Pastoral Guide</a:t>
             </a:r>
@@ -16236,7 +16236,7 @@
                 <a:solidFill>
                   <a:srgbClr val="8B9179"/>
                 </a:solidFill>
-                <a:latin typeface="Karla"/>
+                <a:latin typeface="Calibri"/>
               </a:rPr>
               <a:t>6 / 27</a:t>
             </a:r>
@@ -16353,7 +16353,7 @@
                 <a:solidFill>
                   <a:srgbClr val="963A36"/>
                 </a:solidFill>
-                <a:latin typeface="Karla"/>
+                <a:latin typeface="Calibri"/>
               </a:rPr>
               <a:t>ROUND TWO</a:t>
             </a:r>
@@ -16391,11 +16391,11 @@
               </a:spcAft>
             </a:pPr>
             <a:r>
-              <a:rPr sz="4000" b="1" i="0">
+              <a:rPr sz="4000" b="0" i="0">
                 <a:solidFill>
                   <a:srgbClr val="FFFDF7"/>
                 </a:solidFill>
-                <a:latin typeface="Libre Caslon Display"/>
+                <a:latin typeface="Georgia"/>
               </a:rPr>
               <a:t>Choose or write</a:t>
             </a:r>
@@ -16481,7 +16481,7 @@
                 <a:solidFill>
                   <a:srgbClr val="E8C8C3"/>
                 </a:solidFill>
-                <a:latin typeface="Karla"/>
+                <a:latin typeface="Calibri"/>
               </a:rPr>
               <a:t>Six questions. The first three give you options, and the last three you write out in full.</a:t>
             </a:r>
@@ -16547,7 +16547,7 @@
                 <a:solidFill>
                   <a:srgbClr val="E8C8C3"/>
                 </a:solidFill>
-                <a:latin typeface="Karla"/>
+                <a:latin typeface="Calibri"/>
               </a:rPr>
               <a:t>The Pastoral Guide</a:t>
             </a:r>
@@ -16589,7 +16589,7 @@
                 <a:solidFill>
                   <a:srgbClr val="E8C8C3"/>
                 </a:solidFill>
-                <a:latin typeface="Karla"/>
+                <a:latin typeface="Calibri"/>
               </a:rPr>
               <a:t>7 / 27</a:t>
             </a:r>
@@ -16693,7 +16693,7 @@
                 <a:solidFill>
                   <a:srgbClr val="2F5A44"/>
                 </a:solidFill>
-                <a:latin typeface="Karla"/>
+                <a:latin typeface="Calibri"/>
               </a:rPr>
               <a:t>CHRISTMAS QUIZ  ·  ROUND TWO  ·  QUESTION 5 OF 10</a:t>
             </a:r>
@@ -16869,7 +16869,7 @@
                 <a:solidFill>
                   <a:srgbClr val="FFFDF7"/>
                 </a:solidFill>
-                <a:latin typeface="Karla"/>
+                <a:latin typeface="Calibri"/>
               </a:rPr>
               <a:t>5</a:t>
             </a:r>
@@ -16907,11 +16907,11 @@
               </a:spcAft>
             </a:pPr>
             <a:r>
-              <a:rPr sz="2100" b="1" i="0">
+              <a:rPr sz="2100" b="0" i="0">
                 <a:solidFill>
                   <a:srgbClr val="2F5A44"/>
                 </a:solidFill>
-                <a:latin typeface="Libre Caslon Display"/>
+                <a:latin typeface="Georgia"/>
               </a:rPr>
               <a:t>An economist found that people value the presents they get at less than they cost. Roughly how much of the value is lost?</a:t>
             </a:r>
@@ -16953,7 +16953,7 @@
                 <a:solidFill>
                   <a:srgbClr val="8B9179"/>
                 </a:solidFill>
-                <a:latin typeface="Karla"/>
+                <a:latin typeface="Calibri"/>
               </a:rPr>
               <a:t>ONE OF THESE</a:t>
             </a:r>
@@ -17129,7 +17129,7 @@
                 <a:solidFill>
                   <a:srgbClr val="FFFDF7"/>
                 </a:solidFill>
-                <a:latin typeface="Karla"/>
+                <a:latin typeface="Calibri"/>
               </a:rPr>
               <a:t>A</a:t>
             </a:r>
@@ -17171,7 +17171,7 @@
                 <a:solidFill>
                   <a:srgbClr val="2E3436"/>
                 </a:solidFill>
-                <a:latin typeface="Karla"/>
+                <a:latin typeface="Calibri"/>
               </a:rPr>
               <a:t>About 1 per cent</a:t>
             </a:r>
@@ -17347,7 +17347,7 @@
                 <a:solidFill>
                   <a:srgbClr val="FFFDF7"/>
                 </a:solidFill>
-                <a:latin typeface="Karla"/>
+                <a:latin typeface="Calibri"/>
               </a:rPr>
               <a:t>B</a:t>
             </a:r>
@@ -17389,7 +17389,7 @@
                 <a:solidFill>
                   <a:srgbClr val="2E3436"/>
                 </a:solidFill>
-                <a:latin typeface="Karla"/>
+                <a:latin typeface="Calibri"/>
               </a:rPr>
               <a:t>A tenth to a third</a:t>
             </a:r>
@@ -17565,7 +17565,7 @@
                 <a:solidFill>
                   <a:srgbClr val="FFFDF7"/>
                 </a:solidFill>
-                <a:latin typeface="Karla"/>
+                <a:latin typeface="Calibri"/>
               </a:rPr>
               <a:t>C</a:t>
             </a:r>
@@ -17607,7 +17607,7 @@
                 <a:solidFill>
                   <a:srgbClr val="2E3436"/>
                 </a:solidFill>
-                <a:latin typeface="Karla"/>
+                <a:latin typeface="Calibri"/>
               </a:rPr>
               <a:t>More than half</a:t>
             </a:r>
@@ -17649,7 +17649,7 @@
                 <a:solidFill>
                   <a:srgbClr val="5C6552"/>
                 </a:solidFill>
-                <a:latin typeface="Karla"/>
+                <a:latin typeface="Calibri"/>
               </a:rPr>
               <a:t>Agree it as a team, then tick it on the sheet.</a:t>
             </a:r>
@@ -17715,7 +17715,7 @@
                 <a:solidFill>
                   <a:srgbClr val="8B9179"/>
                 </a:solidFill>
-                <a:latin typeface="Karla"/>
+                <a:latin typeface="Calibri"/>
               </a:rPr>
               <a:t>The Pastoral Guide</a:t>
             </a:r>
@@ -17757,7 +17757,7 @@
                 <a:solidFill>
                   <a:srgbClr val="8B9179"/>
                 </a:solidFill>
-                <a:latin typeface="Karla"/>
+                <a:latin typeface="Calibri"/>
               </a:rPr>
               <a:t>8 / 27</a:t>
             </a:r>
@@ -17861,7 +17861,7 @@
                 <a:solidFill>
                   <a:srgbClr val="2F5A44"/>
                 </a:solidFill>
-                <a:latin typeface="Karla"/>
+                <a:latin typeface="Calibri"/>
               </a:rPr>
               <a:t>CHRISTMAS QUIZ  ·  ROUND TWO  ·  QUESTION 6 OF 10</a:t>
             </a:r>
@@ -18037,7 +18037,7 @@
                 <a:solidFill>
                   <a:srgbClr val="FFFDF7"/>
                 </a:solidFill>
-                <a:latin typeface="Karla"/>
+                <a:latin typeface="Calibri"/>
               </a:rPr>
               <a:t>6</a:t>
             </a:r>
@@ -18075,11 +18075,11 @@
               </a:spcAft>
             </a:pPr>
             <a:r>
-              <a:rPr sz="2400" b="1" i="0">
+              <a:rPr sz="2400" b="0" i="0">
                 <a:solidFill>
                   <a:srgbClr val="2F5A44"/>
                 </a:solidFill>
-                <a:latin typeface="Libre Caslon Display"/>
+                <a:latin typeface="Georgia"/>
               </a:rPr>
               <a:t>How many candles were on the first Advent wreath, in 1839?</a:t>
             </a:r>
@@ -18121,7 +18121,7 @@
                 <a:solidFill>
                   <a:srgbClr val="8B9179"/>
                 </a:solidFill>
-                <a:latin typeface="Karla"/>
+                <a:latin typeface="Calibri"/>
               </a:rPr>
               <a:t>ONE OF THESE</a:t>
             </a:r>
@@ -18297,7 +18297,7 @@
                 <a:solidFill>
                   <a:srgbClr val="FFFDF7"/>
                 </a:solidFill>
-                <a:latin typeface="Karla"/>
+                <a:latin typeface="Calibri"/>
               </a:rPr>
               <a:t>A</a:t>
             </a:r>
@@ -18339,7 +18339,7 @@
                 <a:solidFill>
                   <a:srgbClr val="2E3436"/>
                 </a:solidFill>
-                <a:latin typeface="Karla"/>
+                <a:latin typeface="Calibri"/>
               </a:rPr>
               <a:t>4</a:t>
             </a:r>
@@ -18515,7 +18515,7 @@
                 <a:solidFill>
                   <a:srgbClr val="FFFDF7"/>
                 </a:solidFill>
-                <a:latin typeface="Karla"/>
+                <a:latin typeface="Calibri"/>
               </a:rPr>
               <a:t>B</a:t>
             </a:r>
@@ -18557,7 +18557,7 @@
                 <a:solidFill>
                   <a:srgbClr val="2E3436"/>
                 </a:solidFill>
-                <a:latin typeface="Karla"/>
+                <a:latin typeface="Calibri"/>
               </a:rPr>
               <a:t>12</a:t>
             </a:r>
@@ -18733,7 +18733,7 @@
                 <a:solidFill>
                   <a:srgbClr val="FFFDF7"/>
                 </a:solidFill>
-                <a:latin typeface="Karla"/>
+                <a:latin typeface="Calibri"/>
               </a:rPr>
               <a:t>C</a:t>
             </a:r>
@@ -18775,7 +18775,7 @@
                 <a:solidFill>
                   <a:srgbClr val="2E3436"/>
                 </a:solidFill>
-                <a:latin typeface="Karla"/>
+                <a:latin typeface="Calibri"/>
               </a:rPr>
               <a:t>28</a:t>
             </a:r>
@@ -18817,7 +18817,7 @@
                 <a:solidFill>
                   <a:srgbClr val="5C6552"/>
                 </a:solidFill>
-                <a:latin typeface="Karla"/>
+                <a:latin typeface="Calibri"/>
               </a:rPr>
               <a:t>Agree it as a team, then tick it on the sheet.</a:t>
             </a:r>
@@ -18883,7 +18883,7 @@
                 <a:solidFill>
                   <a:srgbClr val="8B9179"/>
                 </a:solidFill>
-                <a:latin typeface="Karla"/>
+                <a:latin typeface="Calibri"/>
               </a:rPr>
               <a:t>The Pastoral Guide</a:t>
             </a:r>
@@ -18925,7 +18925,7 @@
                 <a:solidFill>
                   <a:srgbClr val="8B9179"/>
                 </a:solidFill>
-                <a:latin typeface="Karla"/>
+                <a:latin typeface="Calibri"/>
               </a:rPr>
               <a:t>9 / 27</a:t>
             </a:r>
